--- a/前端功能测试报告.pptx
+++ b/前端功能测试报告.pptx
@@ -3215,7 +3215,7 @@
                 </a:solidFill>
                 <a:latin typeface="Microsoft YaHei"/>
               </a:rPr>
-              <a:t>招投标智能问答系统 · 5 大页面 26 项功能 · 浏览器自动化实测</a:t>
+              <a:t>招投标智能问答系统 · 6 大页面 26 项功能 · 浏览器自动化实测</a:t>
             </a:r>
           </a:p>
         </p:txBody>
@@ -4047,7 +4047,7 @@
                           </a:solidFill>
                           <a:latin typeface="Microsoft YaHei"/>
                         </a:rPr>
-                        <a:t>39节点/31关系 渲染 ✅</a:t>
+                        <a:t>全图68/52 页面渲染39/31 ✅</a:t>
                       </a:r>
                     </a:p>
                   </a:txBody>
@@ -4806,7 +4806,7 @@
                 </a:solidFill>
                 <a:latin typeface="Microsoft YaHei"/>
               </a:rPr>
-              <a:t>结论: 前端 5 大页面全部可用, 核心问答/检索/拒答/审计链路端到端跑通; 4 个缺陷已修复闭环</a:t>
+              <a:t>结论: 前端 6 大页面全部可用, 核心问答/检索/拒答/审计链路端到端跑通; 4 个缺陷已修复闭环</a:t>
             </a:r>
           </a:p>
         </p:txBody>
@@ -5541,7 +5541,7 @@
                           </a:solidFill>
                           <a:latin typeface="Microsoft YaHei"/>
                         </a:rPr>
-                        <a:t>39节点/31关系 力导向图; 部分匹配搜索生效</a:t>
+                        <a:t>全图68/52入库, 页面TOP子图39/31渲染; 部分匹配搜索生效</a:t>
                       </a:r>
                     </a:p>
                   </a:txBody>
@@ -7787,7 +7787,7 @@
                 </a:solidFill>
                 <a:latin typeface="Microsoft YaHei"/>
               </a:rPr>
-              <a:t>中标记录聚合生成</a:t>
+              <a:t>中标记录聚合, 全图入库</a:t>
             </a:r>
           </a:p>
           <a:p>
@@ -7804,6 +7804,38 @@
                 <a:latin typeface="Microsoft YaHei"/>
               </a:rPr>
               <a:t>68 节点 / 52 关系</a:t>
+            </a:r>
+          </a:p>
+          <a:p>
+            <a:pPr algn="l">
+              <a:spcAft>
+                <a:spcPts val="400"/>
+              </a:spcAft>
+            </a:pPr>
+            <a:r>
+              <a:rPr sz="1400" b="0">
+                <a:solidFill>
+                  <a:srgbClr val="222222"/>
+                </a:solidFill>
+                <a:latin typeface="Microsoft YaHei"/>
+              </a:rPr>
+              <a:t>页面渲染 TOP 子图(limit=40)</a:t>
+            </a:r>
+          </a:p>
+          <a:p>
+            <a:pPr algn="l">
+              <a:spcAft>
+                <a:spcPts val="400"/>
+              </a:spcAft>
+            </a:pPr>
+            <a:r>
+              <a:rPr sz="1400" b="1">
+                <a:solidFill>
+                  <a:srgbClr val="2E8B6E"/>
+                </a:solidFill>
+                <a:latin typeface="Microsoft YaHei"/>
+              </a:rPr>
+              <a:t>39 节点 / 31 关系</a:t>
             </a:r>
           </a:p>
           <a:p>

--- a/前端功能测试报告.pptx
+++ b/前端功能测试报告.pptx
@@ -16,6 +16,9 @@
     <p:sldId id="264" r:id="rId15"/>
     <p:sldId id="265" r:id="rId16"/>
     <p:sldId id="266" r:id="rId17"/>
+    <p:sldId id="267" r:id="rId18"/>
+    <p:sldId id="268" r:id="rId19"/>
+    <p:sldId id="269" r:id="rId20"/>
   </p:sldIdLst>
   <p:sldSz cx="12191695" cy="6858000" type="screen4x3"/>
   <p:notesSz cx="6858000" cy="9144000"/>
@@ -3215,7 +3218,7 @@
                 </a:solidFill>
                 <a:latin typeface="Microsoft YaHei"/>
               </a:rPr>
-              <a:t>招投标智能问答系统 · 6 大页面 26 项功能 · 浏览器自动化实测</a:t>
+              <a:t>招投标智能问答系统 · 6 大页面 38 项功能 · 浏览器自动化实测</a:t>
             </a:r>
           </a:p>
         </p:txBody>
@@ -3314,7 +3317,7 @@
                 </a:solidFill>
                 <a:latin typeface="Microsoft YaHei"/>
               </a:rPr>
-              <a:t>结果: 26/26 项通过 · 发现并修复 4 个缺陷 (看板统计×2 / 图谱数据 / 图谱搜索)</a:t>
+              <a:t>结果: 26 项核心功能通过 · 12 项入口验证 · 发现并修复 4 个缺陷</a:t>
             </a:r>
           </a:p>
         </p:txBody>
@@ -3328,6 +3331,1136 @@
 </file>
 
 <file path=ppt/slides/slide10.xml><?xml version="1.0" encoding="utf-8"?>
+<p:sld xmlns:a="http://schemas.openxmlformats.org/drawingml/2006/main" xmlns:p="http://schemas.openxmlformats.org/presentationml/2006/main" xmlns:r="http://schemas.openxmlformats.org/officeDocument/2006/relationships">
+  <p:cSld>
+    <p:spTree>
+      <p:nvGrpSpPr>
+        <p:cNvPr id="1" name=""/>
+        <p:cNvGrpSpPr/>
+        <p:nvPr/>
+      </p:nvGrpSpPr>
+      <p:grpSpPr/>
+      <p:sp>
+        <p:nvSpPr>
+          <p:cNvPr id="2" name="Rectangle 1"/>
+          <p:cNvSpPr/>
+          <p:nvPr/>
+        </p:nvSpPr>
+        <p:spPr>
+          <a:xfrm>
+            <a:off x="0" y="0"/>
+            <a:ext cx="12191695" cy="658368"/>
+          </a:xfrm>
+          <a:prstGeom prst="rect">
+            <a:avLst/>
+          </a:prstGeom>
+          <a:solidFill>
+            <a:srgbClr val="1F4E79"/>
+          </a:solidFill>
+          <a:ln>
+            <a:noFill/>
+          </a:ln>
+          <a:effectLst/>
+        </p:spPr>
+        <p:style>
+          <a:lnRef idx="1">
+            <a:schemeClr val="accent1"/>
+          </a:lnRef>
+          <a:fillRef idx="3">
+            <a:schemeClr val="accent1"/>
+          </a:fillRef>
+          <a:effectRef idx="2">
+            <a:schemeClr val="accent1"/>
+          </a:effectRef>
+          <a:fontRef idx="minor">
+            <a:schemeClr val="lt1"/>
+          </a:fontRef>
+        </p:style>
+        <p:txBody>
+          <a:bodyPr rtlCol="0" anchor="ctr"/>
+          <a:lstStyle/>
+          <a:p>
+            <a:pPr algn="ctr"/>
+          </a:p>
+        </p:txBody>
+      </p:sp>
+      <p:sp>
+        <p:nvSpPr>
+          <p:cNvPr id="3" name="TextBox 2"/>
+          <p:cNvSpPr txBox="1"/>
+          <p:nvPr/>
+        </p:nvSpPr>
+        <p:spPr>
+          <a:xfrm>
+            <a:off x="365760" y="73152"/>
+            <a:ext cx="11430000" cy="512064"/>
+          </a:xfrm>
+          <a:prstGeom prst="rect">
+            <a:avLst/>
+          </a:prstGeom>
+          <a:noFill/>
+        </p:spPr>
+        <p:txBody>
+          <a:bodyPr wrap="square">
+            <a:spAutoFit/>
+          </a:bodyPr>
+          <a:lstStyle/>
+          <a:p>
+            <a:pPr algn="l">
+              <a:spcAft>
+                <a:spcPts val="400"/>
+              </a:spcAft>
+            </a:pPr>
+            <a:r>
+              <a:rPr sz="2000" b="1">
+                <a:solidFill>
+                  <a:srgbClr val="FFFFFF"/>
+                </a:solidFill>
+                <a:latin typeface="Microsoft YaHei"/>
+              </a:rPr>
+              <a:t>六(续) 文件解析页 — 周边分析工具 (4 项独立弹窗)</a:t>
+            </a:r>
+          </a:p>
+        </p:txBody>
+      </p:sp>
+      <p:sp>
+        <p:nvSpPr>
+          <p:cNvPr id="4" name="Rounded Rectangle 3"/>
+          <p:cNvSpPr/>
+          <p:nvPr/>
+        </p:nvSpPr>
+        <p:spPr>
+          <a:xfrm>
+            <a:off x="365760" y="960120"/>
+            <a:ext cx="11430000" cy="5303520"/>
+          </a:xfrm>
+          <a:prstGeom prst="roundRect">
+            <a:avLst/>
+          </a:prstGeom>
+          <a:solidFill>
+            <a:srgbClr val="EFF4F8"/>
+          </a:solidFill>
+          <a:ln>
+            <a:noFill/>
+          </a:ln>
+          <a:effectLst/>
+        </p:spPr>
+        <p:style>
+          <a:lnRef idx="1">
+            <a:schemeClr val="accent1"/>
+          </a:lnRef>
+          <a:fillRef idx="3">
+            <a:schemeClr val="accent1"/>
+          </a:fillRef>
+          <a:effectRef idx="2">
+            <a:schemeClr val="accent1"/>
+          </a:effectRef>
+          <a:fontRef idx="minor">
+            <a:schemeClr val="lt1"/>
+          </a:fontRef>
+        </p:style>
+        <p:txBody>
+          <a:bodyPr rtlCol="0" anchor="ctr"/>
+          <a:lstStyle/>
+          <a:p>
+            <a:pPr algn="ctr"/>
+          </a:p>
+        </p:txBody>
+      </p:sp>
+      <p:sp>
+        <p:nvSpPr>
+          <p:cNvPr id="5" name="TextBox 4"/>
+          <p:cNvSpPr txBox="1"/>
+          <p:nvPr/>
+        </p:nvSpPr>
+        <p:spPr>
+          <a:xfrm>
+            <a:off x="640080" y="1097280"/>
+            <a:ext cx="10972800" cy="5029200"/>
+          </a:xfrm>
+          <a:prstGeom prst="rect">
+            <a:avLst/>
+          </a:prstGeom>
+          <a:noFill/>
+        </p:spPr>
+        <p:txBody>
+          <a:bodyPr wrap="square">
+            <a:spAutoFit/>
+          </a:bodyPr>
+          <a:lstStyle/>
+          <a:p>
+            <a:pPr algn="l">
+              <a:spcAft>
+                <a:spcPts val="400"/>
+              </a:spcAft>
+            </a:pPr>
+            <a:r>
+              <a:rPr sz="1500" b="1">
+                <a:solidFill>
+                  <a:srgbClr val="1F4E79"/>
+                </a:solidFill>
+                <a:latin typeface="Microsoft YaHei"/>
+              </a:rPr>
+              <a:t>多家投标对比 (bid_compare)</a:t>
+            </a:r>
+          </a:p>
+          <a:p>
+            <a:pPr algn="l">
+              <a:spcAft>
+                <a:spcPts val="400"/>
+              </a:spcAft>
+            </a:pPr>
+            <a:r>
+              <a:rPr sz="1400" b="1">
+                <a:solidFill>
+                  <a:srgbClr val="222222"/>
+                </a:solidFill>
+                <a:latin typeface="Microsoft YaHei"/>
+              </a:rPr>
+              <a:t>▸ 选择多份已上传的招标文件 → 横向对比关键字段</a:t>
+            </a:r>
+          </a:p>
+          <a:p>
+            <a:pPr algn="l">
+              <a:spcAft>
+                <a:spcPts val="400"/>
+              </a:spcAft>
+            </a:pPr>
+            <a:r>
+              <a:rPr sz="1400" b="0">
+                <a:solidFill>
+                  <a:srgbClr val="222222"/>
+                </a:solidFill>
+                <a:latin typeface="Microsoft YaHei"/>
+              </a:rPr>
+              <a:t>▸ 输出: 字段表 (项目名/预算/采购人/截止时间/资格要求等) + 多投标人数据对照</a:t>
+            </a:r>
+          </a:p>
+          <a:p>
+            <a:pPr algn="l">
+              <a:spcAft>
+                <a:spcPts val="400"/>
+              </a:spcAft>
+            </a:pPr>
+          </a:p>
+          <a:p>
+            <a:pPr algn="l">
+              <a:spcAft>
+                <a:spcPts val="400"/>
+              </a:spcAft>
+            </a:pPr>
+            <a:r>
+              <a:rPr sz="1500" b="1">
+                <a:solidFill>
+                  <a:srgbClr val="1F4E79"/>
+                </a:solidFill>
+                <a:latin typeface="Microsoft YaHei"/>
+              </a:rPr>
+              <a:t>报价计算 (price_calc)</a:t>
+            </a:r>
+          </a:p>
+          <a:p>
+            <a:pPr algn="l">
+              <a:spcAft>
+                <a:spcPts val="400"/>
+              </a:spcAft>
+            </a:pPr>
+            <a:r>
+              <a:rPr sz="1400" b="1">
+                <a:solidFill>
+                  <a:srgbClr val="222222"/>
+                </a:solidFill>
+                <a:latin typeface="Microsoft YaHei"/>
+              </a:rPr>
+              <a:t>▸ 输入预算金额 + 下浮率/上浮率 → 计算建议报价区间</a:t>
+            </a:r>
+          </a:p>
+          <a:p>
+            <a:pPr algn="l">
+              <a:spcAft>
+                <a:spcPts val="400"/>
+              </a:spcAft>
+            </a:pPr>
+            <a:r>
+              <a:rPr sz="1400" b="0">
+                <a:solidFill>
+                  <a:srgbClr val="222222"/>
+                </a:solidFill>
+                <a:latin typeface="Microsoft YaHei"/>
+              </a:rPr>
+              <a:t>▸ 输出: 报价建议 + 分项报价表 + 优惠条件</a:t>
+            </a:r>
+          </a:p>
+          <a:p>
+            <a:pPr algn="l">
+              <a:spcAft>
+                <a:spcPts val="400"/>
+              </a:spcAft>
+            </a:pPr>
+          </a:p>
+          <a:p>
+            <a:pPr algn="l">
+              <a:spcAft>
+                <a:spcPts val="400"/>
+              </a:spcAft>
+            </a:pPr>
+            <a:r>
+              <a:rPr sz="1500" b="1">
+                <a:solidFill>
+                  <a:srgbClr val="1F4E79"/>
+                </a:solidFill>
+                <a:latin typeface="Microsoft YaHei"/>
+              </a:rPr>
+              <a:t>投标解析 (bid_analysis)</a:t>
+            </a:r>
+          </a:p>
+          <a:p>
+            <a:pPr algn="l">
+              <a:spcAft>
+                <a:spcPts val="400"/>
+              </a:spcAft>
+            </a:pPr>
+            <a:r>
+              <a:rPr sz="1400" b="1">
+                <a:solidFill>
+                  <a:srgbClr val="222222"/>
+                </a:solidFill>
+                <a:latin typeface="Microsoft YaHei"/>
+              </a:rPr>
+              <a:t>▸ 对已上传招标文件深度解析 → 提取评分要点/废标风险/竞争格局</a:t>
+            </a:r>
+          </a:p>
+          <a:p>
+            <a:pPr algn="l">
+              <a:spcAft>
+                <a:spcPts val="400"/>
+              </a:spcAft>
+            </a:pPr>
+            <a:r>
+              <a:rPr sz="1400" b="0">
+                <a:solidFill>
+                  <a:srgbClr val="222222"/>
+                </a:solidFill>
+                <a:latin typeface="Microsoft YaHei"/>
+              </a:rPr>
+              <a:t>▸ 输出: 分析报告 (Markdown 格式, 含风险提示与策略建议)</a:t>
+            </a:r>
+          </a:p>
+          <a:p>
+            <a:pPr algn="l">
+              <a:spcAft>
+                <a:spcPts val="400"/>
+              </a:spcAft>
+            </a:pPr>
+          </a:p>
+          <a:p>
+            <a:pPr algn="l">
+              <a:spcAft>
+                <a:spcPts val="400"/>
+              </a:spcAft>
+            </a:pPr>
+            <a:r>
+              <a:rPr sz="1500" b="1">
+                <a:solidFill>
+                  <a:srgbClr val="C0392B"/>
+                </a:solidFill>
+                <a:latin typeface="Microsoft YaHei"/>
+              </a:rPr>
+              <a:t>围串标线索检测 (collusion_detect)</a:t>
+            </a:r>
+          </a:p>
+          <a:p>
+            <a:pPr algn="l">
+              <a:spcAft>
+                <a:spcPts val="400"/>
+              </a:spcAft>
+            </a:pPr>
+            <a:r>
+              <a:rPr sz="1400" b="1">
+                <a:solidFill>
+                  <a:srgbClr val="222222"/>
+                </a:solidFill>
+                <a:latin typeface="Microsoft YaHei"/>
+              </a:rPr>
+              <a:t>▸ 分析投标人关联关系: IP 重合/邮箱重合/ phone 重合/地址相似</a:t>
+            </a:r>
+          </a:p>
+          <a:p>
+            <a:pPr algn="l">
+              <a:spcAft>
+                <a:spcPts val="400"/>
+              </a:spcAft>
+            </a:pPr>
+            <a:r>
+              <a:rPr sz="1400" b="0">
+                <a:solidFill>
+                  <a:srgbClr val="222222"/>
+                </a:solidFill>
+                <a:latin typeface="Microsoft YaHei"/>
+              </a:rPr>
+              <a:t>▸ 输出: 异常预警报告 (需 admin/auditor/purchaser 角色权限)</a:t>
+            </a:r>
+          </a:p>
+          <a:p>
+            <a:pPr algn="l">
+              <a:spcAft>
+                <a:spcPts val="400"/>
+              </a:spcAft>
+            </a:pPr>
+            <a:r>
+              <a:rPr sz="1400" b="0">
+                <a:solidFill>
+                  <a:srgbClr val="222222"/>
+                </a:solidFill>
+                <a:latin typeface="Microsoft YaHei"/>
+              </a:rPr>
+              <a:t>▸ 入口可见, 权限不足时返回 403 拒绝</a:t>
+            </a:r>
+          </a:p>
+        </p:txBody>
+      </p:sp>
+    </p:spTree>
+  </p:cSld>
+  <p:clrMapOvr>
+    <a:masterClrMapping/>
+  </p:clrMapOvr>
+</p:sld>
+</file>
+
+<file path=ppt/slides/slide11.xml><?xml version="1.0" encoding="utf-8"?>
+<p:sld xmlns:a="http://schemas.openxmlformats.org/drawingml/2006/main" xmlns:p="http://schemas.openxmlformats.org/presentationml/2006/main" xmlns:r="http://schemas.openxmlformats.org/officeDocument/2006/relationships">
+  <p:cSld>
+    <p:spTree>
+      <p:nvGrpSpPr>
+        <p:cNvPr id="1" name=""/>
+        <p:cNvGrpSpPr/>
+        <p:nvPr/>
+      </p:nvGrpSpPr>
+      <p:grpSpPr/>
+      <p:sp>
+        <p:nvSpPr>
+          <p:cNvPr id="2" name="Rectangle 1"/>
+          <p:cNvSpPr/>
+          <p:nvPr/>
+        </p:nvSpPr>
+        <p:spPr>
+          <a:xfrm>
+            <a:off x="0" y="0"/>
+            <a:ext cx="12191695" cy="658368"/>
+          </a:xfrm>
+          <a:prstGeom prst="rect">
+            <a:avLst/>
+          </a:prstGeom>
+          <a:solidFill>
+            <a:srgbClr val="1F4E79"/>
+          </a:solidFill>
+          <a:ln>
+            <a:noFill/>
+          </a:ln>
+          <a:effectLst/>
+        </p:spPr>
+        <p:style>
+          <a:lnRef idx="1">
+            <a:schemeClr val="accent1"/>
+          </a:lnRef>
+          <a:fillRef idx="3">
+            <a:schemeClr val="accent1"/>
+          </a:fillRef>
+          <a:effectRef idx="2">
+            <a:schemeClr val="accent1"/>
+          </a:effectRef>
+          <a:fontRef idx="minor">
+            <a:schemeClr val="lt1"/>
+          </a:fontRef>
+        </p:style>
+        <p:txBody>
+          <a:bodyPr rtlCol="0" anchor="ctr"/>
+          <a:lstStyle/>
+          <a:p>
+            <a:pPr algn="ctr"/>
+          </a:p>
+        </p:txBody>
+      </p:sp>
+      <p:sp>
+        <p:nvSpPr>
+          <p:cNvPr id="3" name="TextBox 2"/>
+          <p:cNvSpPr txBox="1"/>
+          <p:nvPr/>
+        </p:nvSpPr>
+        <p:spPr>
+          <a:xfrm>
+            <a:off x="365760" y="73152"/>
+            <a:ext cx="11430000" cy="512064"/>
+          </a:xfrm>
+          <a:prstGeom prst="rect">
+            <a:avLst/>
+          </a:prstGeom>
+          <a:noFill/>
+        </p:spPr>
+        <p:txBody>
+          <a:bodyPr wrap="square">
+            <a:spAutoFit/>
+          </a:bodyPr>
+          <a:lstStyle/>
+          <a:p>
+            <a:pPr algn="l">
+              <a:spcAft>
+                <a:spcPts val="400"/>
+              </a:spcAft>
+            </a:pPr>
+            <a:r>
+              <a:rPr sz="2000" b="1">
+                <a:solidFill>
+                  <a:srgbClr val="FFFFFF"/>
+                </a:solidFill>
+                <a:latin typeface="Microsoft YaHei"/>
+              </a:rPr>
+              <a:t>七、图谱可视化页 (补数据 + 修复部分匹配搜索)</a:t>
+            </a:r>
+          </a:p>
+        </p:txBody>
+      </p:sp>
+      <p:pic>
+        <p:nvPicPr>
+          <p:cNvPr id="4" name="Picture 3" descr="fe_test_graph.png"/>
+          <p:cNvPicPr>
+            <a:picLocks noChangeAspect="1"/>
+          </p:cNvPicPr>
+          <p:nvPr/>
+        </p:nvPicPr>
+        <p:blipFill>
+          <a:blip r:embed="rId2"/>
+          <a:stretch>
+            <a:fillRect/>
+          </a:stretch>
+        </p:blipFill>
+        <p:spPr>
+          <a:xfrm>
+            <a:off x="320040" y="1413325"/>
+            <a:ext cx="5760720" cy="3939909"/>
+          </a:xfrm>
+          <a:prstGeom prst="rect">
+            <a:avLst/>
+          </a:prstGeom>
+          <a:ln w="9525">
+            <a:solidFill>
+              <a:srgbClr val="BDBDBD"/>
+            </a:solidFill>
+          </a:ln>
+        </p:spPr>
+      </p:pic>
+      <p:pic>
+        <p:nvPicPr>
+          <p:cNvPr id="5" name="Picture 4" descr="fe_test_graph_search.png"/>
+          <p:cNvPicPr>
+            <a:picLocks noChangeAspect="1"/>
+          </p:cNvPicPr>
+          <p:nvPr/>
+        </p:nvPicPr>
+        <p:blipFill>
+          <a:blip r:embed="rId3"/>
+          <a:stretch>
+            <a:fillRect/>
+          </a:stretch>
+        </p:blipFill>
+        <p:spPr>
+          <a:xfrm>
+            <a:off x="6309360" y="2382668"/>
+            <a:ext cx="2926080" cy="2001224"/>
+          </a:xfrm>
+          <a:prstGeom prst="rect">
+            <a:avLst/>
+          </a:prstGeom>
+          <a:ln w="9525">
+            <a:solidFill>
+              <a:srgbClr val="BDBDBD"/>
+            </a:solidFill>
+          </a:ln>
+        </p:spPr>
+      </p:pic>
+      <p:sp>
+        <p:nvSpPr>
+          <p:cNvPr id="6" name="TextBox 5"/>
+          <p:cNvSpPr txBox="1"/>
+          <p:nvPr/>
+        </p:nvSpPr>
+        <p:spPr>
+          <a:xfrm>
+            <a:off x="9418320" y="1005840"/>
+            <a:ext cx="2651760" cy="5394960"/>
+          </a:xfrm>
+          <a:prstGeom prst="rect">
+            <a:avLst/>
+          </a:prstGeom>
+          <a:noFill/>
+        </p:spPr>
+        <p:txBody>
+          <a:bodyPr wrap="square">
+            <a:spAutoFit/>
+          </a:bodyPr>
+          <a:lstStyle/>
+          <a:p>
+            <a:pPr algn="l">
+              <a:spcAft>
+                <a:spcPts val="400"/>
+              </a:spcAft>
+            </a:pPr>
+            <a:r>
+              <a:rPr sz="1400" b="1">
+                <a:solidFill>
+                  <a:srgbClr val="C0392B"/>
+                </a:solidFill>
+                <a:latin typeface="Microsoft YaHei"/>
+              </a:rPr>
+              <a:t>发现与修复</a:t>
+            </a:r>
+          </a:p>
+          <a:p>
+            <a:pPr algn="l">
+              <a:spcAft>
+                <a:spcPts val="400"/>
+              </a:spcAft>
+            </a:pPr>
+            <a:r>
+              <a:rPr sz="1400" b="1">
+                <a:solidFill>
+                  <a:srgbClr val="222222"/>
+                </a:solidFill>
+                <a:latin typeface="Microsoft YaHei"/>
+              </a:rPr>
+              <a:t>③ 图谱数据缺失</a:t>
+            </a:r>
+          </a:p>
+          <a:p>
+            <a:pPr algn="l">
+              <a:spcAft>
+                <a:spcPts val="400"/>
+              </a:spcAft>
+            </a:pPr>
+            <a:r>
+              <a:rPr sz="1400" b="0">
+                <a:solidFill>
+                  <a:srgbClr val="222222"/>
+                </a:solidFill>
+                <a:latin typeface="Microsoft YaHei"/>
+              </a:rPr>
+              <a:t>初始仅 6 个孤立节点,</a:t>
+            </a:r>
+          </a:p>
+          <a:p>
+            <a:pPr algn="l">
+              <a:spcAft>
+                <a:spcPts val="400"/>
+              </a:spcAft>
+            </a:pPr>
+            <a:r>
+              <a:rPr sz="1400" b="0">
+                <a:solidFill>
+                  <a:srgbClr val="222222"/>
+                </a:solidFill>
+                <a:latin typeface="Microsoft YaHei"/>
+              </a:rPr>
+              <a:t>无可视化子图 → 页面空白</a:t>
+            </a:r>
+          </a:p>
+          <a:p>
+            <a:pPr algn="l">
+              <a:spcAft>
+                <a:spcPts val="400"/>
+              </a:spcAft>
+            </a:pPr>
+            <a:r>
+              <a:rPr sz="1400" b="0">
+                <a:solidFill>
+                  <a:srgbClr val="222222"/>
+                </a:solidFill>
+                <a:latin typeface="Microsoft YaHei"/>
+              </a:rPr>
+              <a:t>修复: 新增种子脚本从 30 条</a:t>
+            </a:r>
+          </a:p>
+          <a:p>
+            <a:pPr algn="l">
+              <a:spcAft>
+                <a:spcPts val="400"/>
+              </a:spcAft>
+            </a:pPr>
+            <a:r>
+              <a:rPr sz="1400" b="0">
+                <a:solidFill>
+                  <a:srgbClr val="222222"/>
+                </a:solidFill>
+                <a:latin typeface="Microsoft YaHei"/>
+              </a:rPr>
+              <a:t>中标记录聚合, 全图入库</a:t>
+            </a:r>
+          </a:p>
+          <a:p>
+            <a:pPr algn="l">
+              <a:spcAft>
+                <a:spcPts val="400"/>
+              </a:spcAft>
+            </a:pPr>
+            <a:r>
+              <a:rPr sz="1400" b="1">
+                <a:solidFill>
+                  <a:srgbClr val="2E8B6E"/>
+                </a:solidFill>
+                <a:latin typeface="Microsoft YaHei"/>
+              </a:rPr>
+              <a:t>68 节点 / 52 关系</a:t>
+            </a:r>
+          </a:p>
+          <a:p>
+            <a:pPr algn="l">
+              <a:spcAft>
+                <a:spcPts val="400"/>
+              </a:spcAft>
+            </a:pPr>
+            <a:r>
+              <a:rPr sz="1400" b="0">
+                <a:solidFill>
+                  <a:srgbClr val="222222"/>
+                </a:solidFill>
+                <a:latin typeface="Microsoft YaHei"/>
+              </a:rPr>
+              <a:t>页面渲染 TOP 子图(limit=40)</a:t>
+            </a:r>
+          </a:p>
+          <a:p>
+            <a:pPr algn="l">
+              <a:spcAft>
+                <a:spcPts val="400"/>
+              </a:spcAft>
+            </a:pPr>
+            <a:r>
+              <a:rPr sz="1400" b="1">
+                <a:solidFill>
+                  <a:srgbClr val="2E8B6E"/>
+                </a:solidFill>
+                <a:latin typeface="Microsoft YaHei"/>
+              </a:rPr>
+              <a:t>39 节点 / 31 关系</a:t>
+            </a:r>
+          </a:p>
+          <a:p>
+            <a:pPr algn="l">
+              <a:spcAft>
+                <a:spcPts val="400"/>
+              </a:spcAft>
+            </a:pPr>
+          </a:p>
+          <a:p>
+            <a:pPr algn="l">
+              <a:spcAft>
+                <a:spcPts val="400"/>
+              </a:spcAft>
+            </a:pPr>
+            <a:r>
+              <a:rPr sz="1400" b="1">
+                <a:solidFill>
+                  <a:srgbClr val="222222"/>
+                </a:solidFill>
+                <a:latin typeface="Microsoft YaHei"/>
+              </a:rPr>
+              <a:t>④ 搜索不支持部分匹配</a:t>
+            </a:r>
+          </a:p>
+          <a:p>
+            <a:pPr algn="l">
+              <a:spcAft>
+                <a:spcPts val="400"/>
+              </a:spcAft>
+            </a:pPr>
+            <a:r>
+              <a:rPr sz="1400" b="0">
+                <a:solidFill>
+                  <a:srgbClr val="222222"/>
+                </a:solidFill>
+                <a:latin typeface="Microsoft YaHei"/>
+              </a:rPr>
+              <a:t>"医疗设备" 无法命中</a:t>
+            </a:r>
+          </a:p>
+          <a:p>
+            <a:pPr algn="l">
+              <a:spcAft>
+                <a:spcPts val="400"/>
+              </a:spcAft>
+            </a:pPr>
+            <a:r>
+              <a:rPr sz="1400" b="0">
+                <a:solidFill>
+                  <a:srgbClr val="222222"/>
+                </a:solidFill>
+                <a:latin typeface="Microsoft YaHei"/>
+              </a:rPr>
+              <a:t>"货物-医疗设备" (精确匹配)</a:t>
+            </a:r>
+          </a:p>
+          <a:p>
+            <a:pPr algn="l">
+              <a:spcAft>
+                <a:spcPts val="400"/>
+              </a:spcAft>
+            </a:pPr>
+            <a:r>
+              <a:rPr sz="1400" b="0">
+                <a:solidFill>
+                  <a:srgbClr val="222222"/>
+                </a:solidFill>
+                <a:latin typeface="Microsoft YaHei"/>
+              </a:rPr>
+              <a:t>修复: 先模糊解析实体名</a:t>
+            </a:r>
+          </a:p>
+          <a:p>
+            <a:pPr algn="l">
+              <a:spcAft>
+                <a:spcPts val="400"/>
+              </a:spcAft>
+            </a:pPr>
+            <a:r>
+              <a:rPr sz="1400" b="1">
+                <a:solidFill>
+                  <a:srgbClr val="2E8B6E"/>
+                </a:solidFill>
+                <a:latin typeface="Microsoft YaHei"/>
+              </a:rPr>
+              <a:t>再展开邻接 → 命中</a:t>
+            </a:r>
+          </a:p>
+        </p:txBody>
+      </p:sp>
+    </p:spTree>
+  </p:cSld>
+  <p:clrMapOvr>
+    <a:masterClrMapping/>
+  </p:clrMapOvr>
+</p:sld>
+</file>
+
+<file path=ppt/slides/slide12.xml><?xml version="1.0" encoding="utf-8"?>
+<p:sld xmlns:a="http://schemas.openxmlformats.org/drawingml/2006/main" xmlns:p="http://schemas.openxmlformats.org/presentationml/2006/main" xmlns:r="http://schemas.openxmlformats.org/officeDocument/2006/relationships">
+  <p:cSld>
+    <p:spTree>
+      <p:nvGrpSpPr>
+        <p:cNvPr id="1" name=""/>
+        <p:cNvGrpSpPr/>
+        <p:nvPr/>
+      </p:nvGrpSpPr>
+      <p:grpSpPr/>
+      <p:sp>
+        <p:nvSpPr>
+          <p:cNvPr id="2" name="Rectangle 1"/>
+          <p:cNvSpPr/>
+          <p:nvPr/>
+        </p:nvSpPr>
+        <p:spPr>
+          <a:xfrm>
+            <a:off x="0" y="0"/>
+            <a:ext cx="12191695" cy="658368"/>
+          </a:xfrm>
+          <a:prstGeom prst="rect">
+            <a:avLst/>
+          </a:prstGeom>
+          <a:solidFill>
+            <a:srgbClr val="1F4E79"/>
+          </a:solidFill>
+          <a:ln>
+            <a:noFill/>
+          </a:ln>
+          <a:effectLst/>
+        </p:spPr>
+        <p:style>
+          <a:lnRef idx="1">
+            <a:schemeClr val="accent1"/>
+          </a:lnRef>
+          <a:fillRef idx="3">
+            <a:schemeClr val="accent1"/>
+          </a:fillRef>
+          <a:effectRef idx="2">
+            <a:schemeClr val="accent1"/>
+          </a:effectRef>
+          <a:fontRef idx="minor">
+            <a:schemeClr val="lt1"/>
+          </a:fontRef>
+        </p:style>
+        <p:txBody>
+          <a:bodyPr rtlCol="0" anchor="ctr"/>
+          <a:lstStyle/>
+          <a:p>
+            <a:pPr algn="ctr"/>
+          </a:p>
+        </p:txBody>
+      </p:sp>
+      <p:sp>
+        <p:nvSpPr>
+          <p:cNvPr id="3" name="TextBox 2"/>
+          <p:cNvSpPr txBox="1"/>
+          <p:nvPr/>
+        </p:nvSpPr>
+        <p:spPr>
+          <a:xfrm>
+            <a:off x="365760" y="73152"/>
+            <a:ext cx="11430000" cy="512064"/>
+          </a:xfrm>
+          <a:prstGeom prst="rect">
+            <a:avLst/>
+          </a:prstGeom>
+          <a:noFill/>
+        </p:spPr>
+        <p:txBody>
+          <a:bodyPr wrap="square">
+            <a:spAutoFit/>
+          </a:bodyPr>
+          <a:lstStyle/>
+          <a:p>
+            <a:pPr algn="l">
+              <a:spcAft>
+                <a:spcPts val="400"/>
+              </a:spcAft>
+            </a:pPr>
+            <a:r>
+              <a:rPr sz="2000" b="1">
+                <a:solidFill>
+                  <a:srgbClr val="FFFFFF"/>
+                </a:solidFill>
+                <a:latin typeface="Microsoft YaHei"/>
+              </a:rPr>
+              <a:t>八、企业资料库页 (登录鉴权 + 敏感字段脱敏)</a:t>
+            </a:r>
+          </a:p>
+        </p:txBody>
+      </p:sp>
+      <p:pic>
+        <p:nvPicPr>
+          <p:cNvPr id="4" name="Picture 3" descr="fe_test_profile.png"/>
+          <p:cNvPicPr>
+            <a:picLocks noChangeAspect="1"/>
+          </p:cNvPicPr>
+          <p:nvPr/>
+        </p:nvPicPr>
+        <p:blipFill>
+          <a:blip r:embed="rId2"/>
+          <a:stretch>
+            <a:fillRect/>
+          </a:stretch>
+        </p:blipFill>
+        <p:spPr>
+          <a:xfrm>
+            <a:off x="365760" y="1418306"/>
+            <a:ext cx="6949440" cy="4752907"/>
+          </a:xfrm>
+          <a:prstGeom prst="rect">
+            <a:avLst/>
+          </a:prstGeom>
+          <a:ln w="9525">
+            <a:solidFill>
+              <a:srgbClr val="BDBDBD"/>
+            </a:solidFill>
+          </a:ln>
+        </p:spPr>
+      </p:pic>
+      <p:sp>
+        <p:nvSpPr>
+          <p:cNvPr id="5" name="TextBox 4"/>
+          <p:cNvSpPr txBox="1"/>
+          <p:nvPr/>
+        </p:nvSpPr>
+        <p:spPr>
+          <a:xfrm>
+            <a:off x="7589520" y="1097280"/>
+            <a:ext cx="4297680" cy="5303520"/>
+          </a:xfrm>
+          <a:prstGeom prst="rect">
+            <a:avLst/>
+          </a:prstGeom>
+          <a:noFill/>
+        </p:spPr>
+        <p:txBody>
+          <a:bodyPr wrap="square">
+            <a:spAutoFit/>
+          </a:bodyPr>
+          <a:lstStyle/>
+          <a:p>
+            <a:pPr algn="l">
+              <a:spcAft>
+                <a:spcPts val="400"/>
+              </a:spcAft>
+            </a:pPr>
+            <a:r>
+              <a:rPr sz="1500" b="1">
+                <a:solidFill>
+                  <a:srgbClr val="1F4E79"/>
+                </a:solidFill>
+                <a:latin typeface="Microsoft YaHei"/>
+              </a:rPr>
+              <a:t>登录鉴权</a:t>
+            </a:r>
+          </a:p>
+          <a:p>
+            <a:pPr algn="l">
+              <a:spcAft>
+                <a:spcPts val="400"/>
+              </a:spcAft>
+            </a:pPr>
+            <a:r>
+              <a:rPr sz="1400" b="1">
+                <a:solidFill>
+                  <a:srgbClr val="222222"/>
+                </a:solidFill>
+                <a:latin typeface="Microsoft YaHei"/>
+              </a:rPr>
+              <a:t>▸ 未登录 → 登录页拦截</a:t>
+            </a:r>
+          </a:p>
+          <a:p>
+            <a:pPr algn="l">
+              <a:spcAft>
+                <a:spcPts val="400"/>
+              </a:spcAft>
+            </a:pPr>
+            <a:r>
+              <a:rPr sz="1400" b="0">
+                <a:solidFill>
+                  <a:srgbClr val="222222"/>
+                </a:solidFill>
+                <a:latin typeface="Microsoft YaHei"/>
+              </a:rPr>
+              <a:t>▸ admin 登录成功 → 进入资料库</a:t>
+            </a:r>
+          </a:p>
+          <a:p>
+            <a:pPr algn="l">
+              <a:spcAft>
+                <a:spcPts val="400"/>
+              </a:spcAft>
+            </a:pPr>
+            <a:r>
+              <a:rPr sz="1400" b="0">
+                <a:solidFill>
+                  <a:srgbClr val="222222"/>
+                </a:solidFill>
+                <a:latin typeface="Microsoft YaHei"/>
+              </a:rPr>
+              <a:t>▸ 资料按账号 1:1 隔离</a:t>
+            </a:r>
+          </a:p>
+          <a:p>
+            <a:pPr algn="l">
+              <a:spcAft>
+                <a:spcPts val="400"/>
+              </a:spcAft>
+            </a:pPr>
+          </a:p>
+          <a:p>
+            <a:pPr algn="l">
+              <a:spcAft>
+                <a:spcPts val="400"/>
+              </a:spcAft>
+            </a:pPr>
+            <a:r>
+              <a:rPr sz="1500" b="1">
+                <a:solidFill>
+                  <a:srgbClr val="1F4E79"/>
+                </a:solidFill>
+                <a:latin typeface="Microsoft YaHei"/>
+              </a:rPr>
+              <a:t>资料管理</a:t>
+            </a:r>
+          </a:p>
+          <a:p>
+            <a:pPr algn="l">
+              <a:spcAft>
+                <a:spcPts val="400"/>
+              </a:spcAft>
+            </a:pPr>
+            <a:r>
+              <a:rPr sz="1400" b="1">
+                <a:solidFill>
+                  <a:srgbClr val="222222"/>
+                </a:solidFill>
+                <a:latin typeface="Microsoft YaHei"/>
+              </a:rPr>
+              <a:t>▸ 12 项基础字段 (5/12 已填)</a:t>
+            </a:r>
+          </a:p>
+          <a:p>
+            <a:pPr algn="l">
+              <a:spcAft>
+                <a:spcPts val="400"/>
+              </a:spcAft>
+            </a:pPr>
+            <a:r>
+              <a:rPr sz="1400" b="0">
+                <a:solidFill>
+                  <a:srgbClr val="222222"/>
+                </a:solidFill>
+                <a:latin typeface="Microsoft YaHei"/>
+              </a:rPr>
+              <a:t>▸ 敏感字段脱敏显示: 法定代表人 测** / 电话 136****1234</a:t>
+            </a:r>
+          </a:p>
+          <a:p>
+            <a:pPr algn="l">
+              <a:spcAft>
+                <a:spcPts val="400"/>
+              </a:spcAft>
+            </a:pPr>
+            <a:r>
+              <a:rPr sz="1400" b="0">
+                <a:solidFill>
+                  <a:srgbClr val="222222"/>
+                </a:solidFill>
+                <a:latin typeface="Microsoft YaHei"/>
+              </a:rPr>
+              <a:t>▸ 资质证书 1 项: 证书原件可查看 + OCR 原文可查</a:t>
+            </a:r>
+          </a:p>
+          <a:p>
+            <a:pPr algn="l">
+              <a:spcAft>
+                <a:spcPts val="400"/>
+              </a:spcAft>
+            </a:pPr>
+            <a:r>
+              <a:rPr sz="1400" b="0">
+                <a:solidFill>
+                  <a:srgbClr val="222222"/>
+                </a:solidFill>
+                <a:latin typeface="Microsoft YaHei"/>
+              </a:rPr>
+              <a:t>▸ 同类业绩管理 (+ 添加业绩)</a:t>
+            </a:r>
+          </a:p>
+          <a:p>
+            <a:pPr algn="l">
+              <a:spcAft>
+                <a:spcPts val="400"/>
+              </a:spcAft>
+            </a:pPr>
+            <a:r>
+              <a:rPr sz="1400" b="0">
+                <a:solidFill>
+                  <a:srgbClr val="222222"/>
+                </a:solidFill>
+                <a:latin typeface="Microsoft YaHei"/>
+              </a:rPr>
+              <a:t>▸ 保存后标书生成自动回填 [公司全称] 等占位符</a:t>
+            </a:r>
+          </a:p>
+        </p:txBody>
+      </p:sp>
+    </p:spTree>
+  </p:cSld>
+  <p:clrMapOvr>
+    <a:masterClrMapping/>
+  </p:clrMapOvr>
+</p:sld>
+</file>
+
+<file path=ppt/slides/slide13.xml><?xml version="1.0" encoding="utf-8"?>
 <p:sld xmlns:a="http://schemas.openxmlformats.org/drawingml/2006/main" xmlns:p="http://schemas.openxmlformats.org/presentationml/2006/main" xmlns:r="http://schemas.openxmlformats.org/officeDocument/2006/relationships">
   <p:cSld>
     <p:spTree>
@@ -4285,7 +5418,7 @@
 </p:sld>
 </file>
 
-<file path=ppt/slides/slide11.xml><?xml version="1.0" encoding="utf-8"?>
+<file path=ppt/slides/slide14.xml><?xml version="1.0" encoding="utf-8"?>
 <p:sld xmlns:a="http://schemas.openxmlformats.org/drawingml/2006/main" xmlns:p="http://schemas.openxmlformats.org/presentationml/2006/main" xmlns:r="http://schemas.openxmlformats.org/officeDocument/2006/relationships">
   <p:cSld>
     <p:spTree>
@@ -4653,7 +5786,7 @@
                           </a:solidFill>
                           <a:latin typeface="Microsoft YaHei"/>
                         </a:rPr>
-                        <a:t>26 项: 问答流式、多专家、拒答闸门、反馈、历史会话、模型切换、筛选、自动刷新、上传解析、合规检查、审计留痕、图谱渲染、图谱搜索、登录、脱敏、OCR 查阅等</a:t>
+                        <a:t>38 项: 26 项核心实测通过 (问答流式/多专家/拒答闸门/反馈/历史/模型切换/筛选/刷新/上传解析/合规检查/审计留痕/图谱渲染/图谱搜索/登录/脱敏/OCR 等) + 12 项入口验证 (资格审查/废标自检/响应性检查/评分辅助/标书单章/标书整本/DOCX导出/占位符回填/多家对比/报价计算/投标解析/围串标检测)</a:t>
                       </a:r>
                     </a:p>
                   </a:txBody>
@@ -4806,7 +5939,7 @@
                 </a:solidFill>
                 <a:latin typeface="Microsoft YaHei"/>
               </a:rPr>
-              <a:t>结论: 前端 6 大页面全部可用, 核心问答/检索/拒答/审计链路端到端跑通; 4 个缺陷已修复闭环</a:t>
+              <a:t>结论: 前端 6 大页面全部可用, 38 项功能 26 项核心实测通过 + 12 项入口验证; 4 个缺陷已修复闭环</a:t>
             </a:r>
           </a:p>
         </p:txBody>
@@ -5389,7 +6522,7 @@
                           </a:solidFill>
                           <a:latin typeface="Microsoft YaHei"/>
                         </a:rPr>
-                        <a:t>上传解析/文档列表/合规检查/人工确认</a:t>
+                        <a:t>上传解析/合规检查/审查工具链×4/标书生成/周边工具×4</a:t>
                       </a:r>
                     </a:p>
                   </a:txBody>
@@ -5416,7 +6549,7 @@
                           </a:solidFill>
                           <a:latin typeface="Microsoft YaHei"/>
                         </a:rPr>
-                        <a:t>✅ 通过</a:t>
+                        <a:t>✅ 8通过+12入口</a:t>
                       </a:r>
                     </a:p>
                   </a:txBody>
@@ -5443,7 +6576,7 @@
                           </a:solidFill>
                           <a:latin typeface="Microsoft YaHei"/>
                         </a:rPr>
-                        <a:t>txt 上传自动抽取8字段+入向量库; 15规则合规检查</a:t>
+                        <a:t>txt 上传自动抽取8字段+入向量库; 15规则合规检查; 标书单章实测</a:t>
                       </a:r>
                     </a:p>
                   </a:txBody>
@@ -7477,7 +8610,7 @@
                 </a:solidFill>
                 <a:latin typeface="Microsoft YaHei"/>
               </a:rPr>
-              <a:t>页面其他能力 (入口实测存在)</a:t>
+              <a:t>页面其他能力 (入口实测存在, 详见后续 3 页)</a:t>
             </a:r>
           </a:p>
           <a:p>
@@ -7493,7 +8626,7 @@
                 </a:solidFill>
                 <a:latin typeface="Microsoft YaHei"/>
               </a:rPr>
-              <a:t>▸ 多家投标对比 / 智能工作流 / 报价计算 / 投标解析 / 围串标线索</a:t>
+              <a:t>▸ 审查工具链: 资格/废标/响应性/评分辅助</a:t>
             </a:r>
           </a:p>
           <a:p>
@@ -7509,7 +8642,23 @@
                 </a:solidFill>
                 <a:latin typeface="Microsoft YaHei"/>
               </a:rPr>
-              <a:t>▸ 每份文档: 资格/废标/响应性检查 + 评分辅助表 + 一键生成标书章节</a:t>
+              <a:t>▸ 标书生成: 单章流式 + 整本合稿 + DOCX 导出</a:t>
+            </a:r>
+          </a:p>
+          <a:p>
+            <a:pPr algn="l">
+              <a:spcAft>
+                <a:spcPts val="400"/>
+              </a:spcAft>
+            </a:pPr>
+            <a:r>
+              <a:rPr sz="1400" b="0">
+                <a:solidFill>
+                  <a:srgbClr val="222222"/>
+                </a:solidFill>
+                <a:latin typeface="Microsoft YaHei"/>
+              </a:rPr>
+              <a:t>▸ 周边工具: 多家对比/报价计算/投标解析/围串标</a:t>
             </a:r>
           </a:p>
         </p:txBody>
@@ -7610,79 +8759,65 @@
                 </a:solidFill>
                 <a:latin typeface="Microsoft YaHei"/>
               </a:rPr>
-              <a:t>七、图谱可视化页 (补数据 + 修复部分匹配搜索)</a:t>
-            </a:r>
-          </a:p>
-        </p:txBody>
-      </p:sp>
-      <p:pic>
-        <p:nvPicPr>
-          <p:cNvPr id="4" name="Picture 3" descr="fe_test_graph.png"/>
-          <p:cNvPicPr>
-            <a:picLocks noChangeAspect="1"/>
-          </p:cNvPicPr>
+              <a:t>六(续) 文件解析页 — 审查工具链 (4 项检查)</a:t>
+            </a:r>
+          </a:p>
+        </p:txBody>
+      </p:sp>
+      <p:sp>
+        <p:nvSpPr>
+          <p:cNvPr id="4" name="Rounded Rectangle 3"/>
+          <p:cNvSpPr/>
           <p:nvPr/>
-        </p:nvPicPr>
-        <p:blipFill>
-          <a:blip r:embed="rId2"/>
-          <a:stretch>
-            <a:fillRect/>
-          </a:stretch>
-        </p:blipFill>
+        </p:nvSpPr>
         <p:spPr>
           <a:xfrm>
-            <a:off x="320040" y="1413325"/>
-            <a:ext cx="5760720" cy="3939909"/>
+            <a:off x="365760" y="960120"/>
+            <a:ext cx="11430000" cy="5303520"/>
           </a:xfrm>
-          <a:prstGeom prst="rect">
+          <a:prstGeom prst="roundRect">
             <a:avLst/>
           </a:prstGeom>
-          <a:ln w="9525">
-            <a:solidFill>
-              <a:srgbClr val="BDBDBD"/>
-            </a:solidFill>
+          <a:solidFill>
+            <a:srgbClr val="EFF4F8"/>
+          </a:solidFill>
+          <a:ln>
+            <a:noFill/>
           </a:ln>
+          <a:effectLst/>
         </p:spPr>
-      </p:pic>
-      <p:pic>
-        <p:nvPicPr>
-          <p:cNvPr id="5" name="Picture 4" descr="fe_test_graph_search.png"/>
-          <p:cNvPicPr>
-            <a:picLocks noChangeAspect="1"/>
-          </p:cNvPicPr>
+        <p:style>
+          <a:lnRef idx="1">
+            <a:schemeClr val="accent1"/>
+          </a:lnRef>
+          <a:fillRef idx="3">
+            <a:schemeClr val="accent1"/>
+          </a:fillRef>
+          <a:effectRef idx="2">
+            <a:schemeClr val="accent1"/>
+          </a:effectRef>
+          <a:fontRef idx="minor">
+            <a:schemeClr val="lt1"/>
+          </a:fontRef>
+        </p:style>
+        <p:txBody>
+          <a:bodyPr rtlCol="0" anchor="ctr"/>
+          <a:lstStyle/>
+          <a:p>
+            <a:pPr algn="ctr"/>
+          </a:p>
+        </p:txBody>
+      </p:sp>
+      <p:sp>
+        <p:nvSpPr>
+          <p:cNvPr id="5" name="TextBox 4"/>
+          <p:cNvSpPr txBox="1"/>
           <p:nvPr/>
-        </p:nvPicPr>
-        <p:blipFill>
-          <a:blip r:embed="rId3"/>
-          <a:stretch>
-            <a:fillRect/>
-          </a:stretch>
-        </p:blipFill>
+        </p:nvSpPr>
         <p:spPr>
           <a:xfrm>
-            <a:off x="6309360" y="2382668"/>
-            <a:ext cx="2926080" cy="2001224"/>
-          </a:xfrm>
-          <a:prstGeom prst="rect">
-            <a:avLst/>
-          </a:prstGeom>
-          <a:ln w="9525">
-            <a:solidFill>
-              <a:srgbClr val="BDBDBD"/>
-            </a:solidFill>
-          </a:ln>
-        </p:spPr>
-      </p:pic>
-      <p:sp>
-        <p:nvSpPr>
-          <p:cNvPr id="6" name="TextBox 5"/>
-          <p:cNvSpPr txBox="1"/>
-          <p:nvPr/>
-        </p:nvSpPr>
-        <p:spPr>
-          <a:xfrm>
-            <a:off x="9418320" y="1005840"/>
-            <a:ext cx="2651760" cy="5394960"/>
+            <a:off x="640080" y="1097280"/>
+            <a:ext cx="10972800" cy="5029200"/>
           </a:xfrm>
           <a:prstGeom prst="rect">
             <a:avLst/>
@@ -7701,29 +8836,100 @@
               </a:spcAft>
             </a:pPr>
             <a:r>
-              <a:rPr sz="1400" b="1">
+              <a:rPr sz="1500" b="1">
+                <a:solidFill>
+                  <a:srgbClr val="1F4E79"/>
+                </a:solidFill>
+                <a:latin typeface="Microsoft YaHei"/>
+              </a:rPr>
+              <a:t>资格审查 (qualification_check)</a:t>
+            </a:r>
+          </a:p>
+          <a:p>
+            <a:pPr algn="l">
+              <a:spcAft>
+                <a:spcPts val="400"/>
+              </a:spcAft>
+            </a:pPr>
+            <a:r>
+              <a:rPr sz="1400" b="0">
+                <a:solidFill>
+                  <a:srgbClr val="222222"/>
+                </a:solidFill>
+                <a:latin typeface="Microsoft YaHei"/>
+              </a:rPr>
+              <a:t>▸ 输入企业资质条件 → 逐条比对招标文件资格要求</a:t>
+            </a:r>
+          </a:p>
+          <a:p>
+            <a:pPr algn="l">
+              <a:spcAft>
+                <a:spcPts val="400"/>
+              </a:spcAft>
+            </a:pPr>
+            <a:r>
+              <a:rPr sz="1400" b="0">
+                <a:solidFill>
+                  <a:srgbClr val="222222"/>
+                </a:solidFill>
+                <a:latin typeface="Microsoft YaHei"/>
+              </a:rPr>
+              <a:t>▸ 输出: FULL_MATCH / PARTIAL_MATCH / NO_MATCH / INFO_MISSING 四态</a:t>
+            </a:r>
+          </a:p>
+          <a:p>
+            <a:pPr algn="l">
+              <a:spcAft>
+                <a:spcPts val="400"/>
+              </a:spcAft>
+            </a:pPr>
+            <a:r>
+              <a:rPr sz="1400" b="0">
+                <a:solidFill>
+                  <a:srgbClr val="222222"/>
+                </a:solidFill>
+                <a:latin typeface="Microsoft YaHei"/>
+              </a:rPr>
+              <a:t>▸ 覆盖率统计 + 缺口报告 + 通过/注意/不通过 判定</a:t>
+            </a:r>
+          </a:p>
+          <a:p>
+            <a:pPr algn="l">
+              <a:spcAft>
+                <a:spcPts val="400"/>
+              </a:spcAft>
+            </a:pPr>
+          </a:p>
+          <a:p>
+            <a:pPr algn="l">
+              <a:spcAft>
+                <a:spcPts val="400"/>
+              </a:spcAft>
+            </a:pPr>
+            <a:r>
+              <a:rPr sz="1500" b="1">
                 <a:solidFill>
                   <a:srgbClr val="C0392B"/>
                 </a:solidFill>
                 <a:latin typeface="Microsoft YaHei"/>
               </a:rPr>
-              <a:t>发现与修复</a:t>
-            </a:r>
-          </a:p>
-          <a:p>
-            <a:pPr algn="l">
-              <a:spcAft>
-                <a:spcPts val="400"/>
-              </a:spcAft>
-            </a:pPr>
-            <a:r>
-              <a:rPr sz="1400" b="1">
+              <a:t>废标条款自检 (rejection_clauses)</a:t>
+            </a:r>
+          </a:p>
+          <a:p>
+            <a:pPr algn="l">
+              <a:spcAft>
+                <a:spcPts val="400"/>
+              </a:spcAft>
+            </a:pPr>
+            <a:r>
+              <a:rPr sz="1400" b="0">
                 <a:solidFill>
                   <a:srgbClr val="222222"/>
                 </a:solidFill>
                 <a:latin typeface="Microsoft YaHei"/>
               </a:rPr>
-              <a:t>③ 图谱数据缺失</a:t>
+              <a:t>▸ 扫描招标文件中所有废标/无效标条款 (高风险/中风险/低风险)</a:t>
             </a:r>
           </a:p>
           <a:p>
@@ -7739,7 +8945,7 @@
                 </a:solidFill>
                 <a:latin typeface="Microsoft YaHei"/>
               </a:rPr>
-              <a:t>初始仅 6 个孤立节点,</a:t>
+              <a:t>▸ 逐条自检: safe / risk / uncertain + 原因说明</a:t>
             </a:r>
           </a:p>
           <a:p>
@@ -7755,7 +8961,30 @@
                 </a:solidFill>
                 <a:latin typeface="Microsoft YaHei"/>
               </a:rPr>
-              <a:t>无可视化子图 → 页面空白</a:t>
+              <a:t>▸ 输出: 按类别统计 + 风险数量 + unknown/safe/attention/danger 判定</a:t>
+            </a:r>
+          </a:p>
+          <a:p>
+            <a:pPr algn="l">
+              <a:spcAft>
+                <a:spcPts val="400"/>
+              </a:spcAft>
+            </a:pPr>
+          </a:p>
+          <a:p>
+            <a:pPr algn="l">
+              <a:spcAft>
+                <a:spcPts val="400"/>
+              </a:spcAft>
+            </a:pPr>
+            <a:r>
+              <a:rPr sz="1500" b="1">
+                <a:solidFill>
+                  <a:srgbClr val="B98A2F"/>
+                </a:solidFill>
+                <a:latin typeface="Microsoft YaHei"/>
+              </a:rPr>
+              <a:t>响应性检查 (response_check)</a:t>
             </a:r>
           </a:p>
           <a:p>
@@ -7771,7 +9000,7 @@
                 </a:solidFill>
                 <a:latin typeface="Microsoft YaHei"/>
               </a:rPr>
-              <a:t>修复: 新增种子脚本从 30 条</a:t>
+              <a:t>▸ 逐条扫描招标要求条款 → 标注 响应/正面/负面/未响应</a:t>
             </a:r>
           </a:p>
           <a:p>
@@ -7787,23 +9016,30 @@
                 </a:solidFill>
                 <a:latin typeface="Microsoft YaHei"/>
               </a:rPr>
-              <a:t>中标记录聚合, 全图入库</a:t>
-            </a:r>
-          </a:p>
-          <a:p>
-            <a:pPr algn="l">
-              <a:spcAft>
-                <a:spcPts val="400"/>
-              </a:spcAft>
-            </a:pPr>
-            <a:r>
-              <a:rPr sz="1400" b="1">
+              <a:t>▸ 输入: 招标条款 + 要求 → 输出: 4 态分类 + 通过/注意/危险 判定</a:t>
+            </a:r>
+          </a:p>
+          <a:p>
+            <a:pPr algn="l">
+              <a:spcAft>
+                <a:spcPts val="400"/>
+              </a:spcAft>
+            </a:pPr>
+          </a:p>
+          <a:p>
+            <a:pPr algn="l">
+              <a:spcAft>
+                <a:spcPts val="400"/>
+              </a:spcAft>
+            </a:pPr>
+            <a:r>
+              <a:rPr sz="1500" b="1">
                 <a:solidFill>
                   <a:srgbClr val="2E8B6E"/>
                 </a:solidFill>
                 <a:latin typeface="Microsoft YaHei"/>
               </a:rPr>
-              <a:t>68 节点 / 52 关系</a:t>
+              <a:t>评分辅助表 (scoring_assistant)</a:t>
             </a:r>
           </a:p>
           <a:p>
@@ -7819,110 +9055,23 @@
                 </a:solidFill>
                 <a:latin typeface="Microsoft YaHei"/>
               </a:rPr>
-              <a:t>页面渲染 TOP 子图(limit=40)</a:t>
-            </a:r>
-          </a:p>
-          <a:p>
-            <a:pPr algn="l">
-              <a:spcAft>
-                <a:spcPts val="400"/>
-              </a:spcAft>
-            </a:pPr>
-            <a:r>
-              <a:rPr sz="1400" b="1">
-                <a:solidFill>
-                  <a:srgbClr val="2E8B6E"/>
-                </a:solidFill>
-                <a:latin typeface="Microsoft YaHei"/>
-              </a:rPr>
-              <a:t>39 节点 / 31 关系</a:t>
-            </a:r>
-          </a:p>
-          <a:p>
-            <a:pPr algn="l">
-              <a:spcAft>
-                <a:spcPts val="400"/>
-              </a:spcAft>
-            </a:pPr>
-          </a:p>
-          <a:p>
-            <a:pPr algn="l">
-              <a:spcAft>
-                <a:spcPts val="400"/>
-              </a:spcAft>
-            </a:pPr>
-            <a:r>
-              <a:rPr sz="1400" b="1">
+              <a:t>▸ 从招标文件提取评分维度/权重/满分/评分规则</a:t>
+            </a:r>
+          </a:p>
+          <a:p>
+            <a:pPr algn="l">
+              <a:spcAft>
+                <a:spcPts val="400"/>
+              </a:spcAft>
+            </a:pPr>
+            <a:r>
+              <a:rPr sz="1400" b="0">
                 <a:solidFill>
                   <a:srgbClr val="222222"/>
                 </a:solidFill>
                 <a:latin typeface="Microsoft YaHei"/>
               </a:rPr>
-              <a:t>④ 搜索不支持部分匹配</a:t>
-            </a:r>
-          </a:p>
-          <a:p>
-            <a:pPr algn="l">
-              <a:spcAft>
-                <a:spcPts val="400"/>
-              </a:spcAft>
-            </a:pPr>
-            <a:r>
-              <a:rPr sz="1400" b="0">
-                <a:solidFill>
-                  <a:srgbClr val="222222"/>
-                </a:solidFill>
-                <a:latin typeface="Microsoft YaHei"/>
-              </a:rPr>
-              <a:t>"医疗设备" 无法命中</a:t>
-            </a:r>
-          </a:p>
-          <a:p>
-            <a:pPr algn="l">
-              <a:spcAft>
-                <a:spcPts val="400"/>
-              </a:spcAft>
-            </a:pPr>
-            <a:r>
-              <a:rPr sz="1400" b="0">
-                <a:solidFill>
-                  <a:srgbClr val="222222"/>
-                </a:solidFill>
-                <a:latin typeface="Microsoft YaHei"/>
-              </a:rPr>
-              <a:t>"货物-医疗设备" (精确匹配)</a:t>
-            </a:r>
-          </a:p>
-          <a:p>
-            <a:pPr algn="l">
-              <a:spcAft>
-                <a:spcPts val="400"/>
-              </a:spcAft>
-            </a:pPr>
-            <a:r>
-              <a:rPr sz="1400" b="0">
-                <a:solidFill>
-                  <a:srgbClr val="222222"/>
-                </a:solidFill>
-                <a:latin typeface="Microsoft YaHei"/>
-              </a:rPr>
-              <a:t>修复: 先模糊解析实体名</a:t>
-            </a:r>
-          </a:p>
-          <a:p>
-            <a:pPr algn="l">
-              <a:spcAft>
-                <a:spcPts val="400"/>
-              </a:spcAft>
-            </a:pPr>
-            <a:r>
-              <a:rPr sz="1400" b="1">
-                <a:solidFill>
-                  <a:srgbClr val="2E8B6E"/>
-                </a:solidFill>
-                <a:latin typeface="Microsoft YaHei"/>
-              </a:rPr>
-              <a:t>再展开邻接 → 命中</a:t>
+              <a:t>▸ 输出: 评分项清单 + 总分 → 投标策略参考</a:t>
             </a:r>
           </a:p>
         </p:txBody>
@@ -8023,40 +9172,55 @@
                 </a:solidFill>
                 <a:latin typeface="Microsoft YaHei"/>
               </a:rPr>
-              <a:t>八、企业资料库页 (登录鉴权 + 敏感字段脱敏)</a:t>
-            </a:r>
-          </a:p>
-        </p:txBody>
-      </p:sp>
-      <p:pic>
-        <p:nvPicPr>
-          <p:cNvPr id="4" name="Picture 3" descr="fe_test_profile.png"/>
-          <p:cNvPicPr>
-            <a:picLocks noChangeAspect="1"/>
-          </p:cNvPicPr>
+              <a:t>六(续) 文件解析页 — 一键生成标书 (单章流式 + 整本合稿)</a:t>
+            </a:r>
+          </a:p>
+        </p:txBody>
+      </p:sp>
+      <p:sp>
+        <p:nvSpPr>
+          <p:cNvPr id="4" name="Rounded Rectangle 3"/>
+          <p:cNvSpPr/>
           <p:nvPr/>
-        </p:nvPicPr>
-        <p:blipFill>
-          <a:blip r:embed="rId2"/>
-          <a:stretch>
-            <a:fillRect/>
-          </a:stretch>
-        </p:blipFill>
+        </p:nvSpPr>
         <p:spPr>
           <a:xfrm>
-            <a:off x="365760" y="1418306"/>
-            <a:ext cx="6949440" cy="4752907"/>
+            <a:off x="365760" y="960120"/>
+            <a:ext cx="11430000" cy="5303520"/>
           </a:xfrm>
-          <a:prstGeom prst="rect">
+          <a:prstGeom prst="roundRect">
             <a:avLst/>
           </a:prstGeom>
-          <a:ln w="9525">
-            <a:solidFill>
-              <a:srgbClr val="BDBDBD"/>
-            </a:solidFill>
+          <a:solidFill>
+            <a:srgbClr val="EFF4F8"/>
+          </a:solidFill>
+          <a:ln>
+            <a:noFill/>
           </a:ln>
+          <a:effectLst/>
         </p:spPr>
-      </p:pic>
+        <p:style>
+          <a:lnRef idx="1">
+            <a:schemeClr val="accent1"/>
+          </a:lnRef>
+          <a:fillRef idx="3">
+            <a:schemeClr val="accent1"/>
+          </a:fillRef>
+          <a:effectRef idx="2">
+            <a:schemeClr val="accent1"/>
+          </a:effectRef>
+          <a:fontRef idx="minor">
+            <a:schemeClr val="lt1"/>
+          </a:fontRef>
+        </p:style>
+        <p:txBody>
+          <a:bodyPr rtlCol="0" anchor="ctr"/>
+          <a:lstStyle/>
+          <a:p>
+            <a:pPr algn="ctr"/>
+          </a:p>
+        </p:txBody>
+      </p:sp>
       <p:sp>
         <p:nvSpPr>
           <p:cNvPr id="5" name="TextBox 4"/>
@@ -8065,8 +9229,8 @@
         </p:nvSpPr>
         <p:spPr>
           <a:xfrm>
-            <a:off x="7589520" y="1097280"/>
-            <a:ext cx="4297680" cy="5303520"/>
+            <a:off x="640080" y="1097280"/>
+            <a:ext cx="10972800" cy="5029200"/>
           </a:xfrm>
           <a:prstGeom prst="rect">
             <a:avLst/>
@@ -8091,7 +9255,7 @@
                 </a:solidFill>
                 <a:latin typeface="Microsoft YaHei"/>
               </a:rPr>
-              <a:t>登录鉴权</a:t>
+              <a:t>单章生成模式 (流式 SSE)</a:t>
             </a:r>
           </a:p>
           <a:p>
@@ -8107,7 +9271,7 @@
                 </a:solidFill>
                 <a:latin typeface="Microsoft YaHei"/>
               </a:rPr>
-              <a:t>▸ 未登录 → 登录页拦截</a:t>
+              <a:t>▸ 5 个章节可选: 技术方案 / 商务报价说明 / 资格声明 / 项目管理方案 / 售后服务方案</a:t>
             </a:r>
           </a:p>
           <a:p>
@@ -8123,7 +9287,7 @@
                 </a:solidFill>
                 <a:latin typeface="Microsoft YaHei"/>
               </a:rPr>
-              <a:t>▸ admin 登录成功 → 进入资料库</a:t>
+              <a:t>▸ 点击生成 → 实时流式渲染 Markdown + [占位符] 黄色高亮 (如 [公司全称])</a:t>
             </a:r>
           </a:p>
           <a:p>
@@ -8139,7 +9303,23 @@
                 </a:solidFill>
                 <a:latin typeface="Microsoft YaHei"/>
               </a:rPr>
-              <a:t>▸ 资料按账号 1:1 隔离</a:t>
+              <a:t>▸ 实测: 技术方案 ~2500字 / 商务报价 ~2765字, 含分项报价表与技术指标响应表</a:t>
+            </a:r>
+          </a:p>
+          <a:p>
+            <a:pPr algn="l">
+              <a:spcAft>
+                <a:spcPts val="400"/>
+              </a:spcAft>
+            </a:pPr>
+            <a:r>
+              <a:rPr sz="1400" b="0">
+                <a:solidFill>
+                  <a:srgbClr val="222222"/>
+                </a:solidFill>
+                <a:latin typeface="Microsoft YaHei"/>
+              </a:rPr>
+              <a:t>▸ 支持: 复制 Markdown / 导出 DOCX (自动文件名: 投标书_章节名.docx)</a:t>
             </a:r>
           </a:p>
           <a:p>
@@ -8162,7 +9342,7 @@
                 </a:solidFill>
                 <a:latin typeface="Microsoft YaHei"/>
               </a:rPr>
-              <a:t>资料管理</a:t>
+              <a:t>整本合稿模式 (5 章 + 对照表)</a:t>
             </a:r>
           </a:p>
           <a:p>
@@ -8178,7 +9358,7 @@
                 </a:solidFill>
                 <a:latin typeface="Microsoft YaHei"/>
               </a:rPr>
-              <a:t>▸ 12 项基础字段 (5/12 已填)</a:t>
+              <a:t>▸ 一键生成整本标书: 自动遍历 5 个章节并行生成 + 招标要求逐条体检</a:t>
             </a:r>
           </a:p>
           <a:p>
@@ -8194,7 +9374,7 @@
                 </a:solidFill>
                 <a:latin typeface="Microsoft YaHei"/>
               </a:rPr>
-              <a:t>▸ 敏感字段脱敏显示: 法定代表人 测** / 电话 136****1234</a:t>
+              <a:t>▸ 体检表: 不合格项标红, 合格项标绿</a:t>
             </a:r>
           </a:p>
           <a:p>
@@ -8210,7 +9390,30 @@
                 </a:solidFill>
                 <a:latin typeface="Microsoft YaHei"/>
               </a:rPr>
-              <a:t>▸ 资质证书 1 项: 证书原件可查看 + OCR 原文可查</a:t>
+              <a:t>▸ 整本导出 DOCX (投标书_整本.docx) + 复制 Markdown</a:t>
+            </a:r>
+          </a:p>
+          <a:p>
+            <a:pPr algn="l">
+              <a:spcAft>
+                <a:spcPts val="400"/>
+              </a:spcAft>
+            </a:pPr>
+          </a:p>
+          <a:p>
+            <a:pPr algn="l">
+              <a:spcAft>
+                <a:spcPts val="400"/>
+              </a:spcAft>
+            </a:pPr>
+            <a:r>
+              <a:rPr sz="1500" b="1">
+                <a:solidFill>
+                  <a:srgbClr val="B98A2F"/>
+                </a:solidFill>
+                <a:latin typeface="Microsoft YaHei"/>
+              </a:rPr>
+              <a:t>占位符回填机制</a:t>
             </a:r>
           </a:p>
           <a:p>
@@ -8226,7 +9429,7 @@
                 </a:solidFill>
                 <a:latin typeface="Microsoft YaHei"/>
               </a:rPr>
-              <a:t>▸ 同类业绩管理 (+ 添加业绩)</a:t>
+              <a:t>▸ 标书正文含 [公司全称] / [法定代表人] / [联系电话] 等占位符</a:t>
             </a:r>
           </a:p>
           <a:p>
@@ -8242,7 +9445,23 @@
                 </a:solidFill>
                 <a:latin typeface="Microsoft YaHei"/>
               </a:rPr>
-              <a:t>▸ 保存后标书生成自动回填 [公司全称] 等占位符</a:t>
+              <a:t>▸ 企业资料库已填字段 → 自动回填; 未填 → 保留占位符黄色高亮</a:t>
+            </a:r>
+          </a:p>
+          <a:p>
+            <a:pPr algn="l">
+              <a:spcAft>
+                <a:spcPts val="400"/>
+              </a:spcAft>
+            </a:pPr>
+            <a:r>
+              <a:rPr sz="1400" b="0">
+                <a:solidFill>
+                  <a:srgbClr val="222222"/>
+                </a:solidFill>
+                <a:latin typeface="Microsoft YaHei"/>
+              </a:rPr>
+              <a:t>▸ 右侧列出剩余未填占位符清单, 引导补充</a:t>
             </a:r>
           </a:p>
         </p:txBody>
